--- a/Clients/CDLX/presentation/Technijian for CardLogix - Meeting Deck.pptx
+++ b/Clients/CDLX/presentation/Technijian for CardLogix - Meeting Deck.pptx
@@ -8363,7 +8363,7 @@
                 <a:ea typeface="Arial" pitchFamily="34" charset="-122"/>
                 <a:cs typeface="Arial" pitchFamily="34" charset="-120"/>
               </a:rPr>
-              <a:t>24/7 SOC</a:t>
+              <a:t>24/7 MDR</a:t>
             </a:r>
             <a:endParaRPr lang="en-US" sz="900" dirty="0"/>
           </a:p>
@@ -12745,7 +12745,7 @@
                 <a:ea typeface="Arial" pitchFamily="34" charset="-122"/>
                 <a:cs typeface="Arial" pitchFamily="34" charset="-120"/>
               </a:rPr>
-              <a:t>24/7 SOC + 15-minute critical SLA</a:t>
+              <a:t>24/7 MDR + 15-minute critical SLA</a:t>
             </a:r>
             <a:endParaRPr lang="en-US" sz="1050" dirty="0"/>
           </a:p>
